--- a/The OutThinkers_26085.pptx
+++ b/The OutThinkers_26085.pptx
@@ -4394,6 +4394,2536 @@
           </a:p>
         </p:txBody>
       </p:sp>
+      <p:sp>
+        <p:nvSpPr>
+          <p:cNvPr id="5" name="TextBox 4">
+            <a:extLst>
+              <a:ext uri="{FF2B5EF4-FFF2-40B4-BE49-F238E27FC236}">
+                <a16:creationId xmlns:a16="http://schemas.microsoft.com/office/drawing/2014/main" id="{8F58BB4A-9FE9-05B7-84E6-7A3F7B00AB55}"/>
+              </a:ext>
+            </a:extLst>
+          </p:cNvPr>
+          <p:cNvSpPr txBox="1"/>
+          <p:nvPr/>
+        </p:nvSpPr>
+        <p:spPr>
+          <a:xfrm>
+            <a:off x="1236593" y="585302"/>
+            <a:ext cx="8868697" cy="646331"/>
+          </a:xfrm>
+          <a:prstGeom prst="rect">
+            <a:avLst/>
+          </a:prstGeom>
+          <a:noFill/>
+        </p:spPr>
+        <p:txBody>
+          <a:bodyPr wrap="square">
+            <a:spAutoFit/>
+          </a:bodyPr>
+          <a:lstStyle/>
+          <a:p>
+            <a:pPr>
+              <a:buNone/>
+            </a:pPr>
+            <a:r>
+              <a:rPr lang="en-IN" b="1" dirty="0"/>
+              <a:t>Physics-Informed Urban Flood Nowcasting through Rainfall–Terrain–Drainage Coupling</a:t>
+            </a:r>
+          </a:p>
+          <a:p>
+            <a:pPr>
+              <a:buNone/>
+            </a:pPr>
+            <a:r>
+              <a:rPr lang="en-IN" b="1" dirty="0"/>
+              <a:t>                </a:t>
+            </a:r>
+            <a:r>
+              <a:rPr lang="en-IN" b="1" dirty="0">
+                <a:solidFill>
+                  <a:schemeClr val="accent1">
+                    <a:lumMod val="75000"/>
+                  </a:schemeClr>
+                </a:solidFill>
+              </a:rPr>
+              <a:t>From rainfall forecasting → coupled urban inundation nowcasting</a:t>
+            </a:r>
+            <a:endParaRPr lang="en-IN" dirty="0">
+              <a:solidFill>
+                <a:schemeClr val="accent1">
+                  <a:lumMod val="75000"/>
+                </a:schemeClr>
+              </a:solidFill>
+            </a:endParaRPr>
+          </a:p>
+        </p:txBody>
+      </p:sp>
+      <p:sp>
+        <p:nvSpPr>
+          <p:cNvPr id="7" name="Rectangle 6">
+            <a:extLst>
+              <a:ext uri="{FF2B5EF4-FFF2-40B4-BE49-F238E27FC236}">
+                <a16:creationId xmlns:a16="http://schemas.microsoft.com/office/drawing/2014/main" id="{7452C1E5-F651-C0FE-A203-035E0EA598C0}"/>
+              </a:ext>
+            </a:extLst>
+          </p:cNvPr>
+          <p:cNvSpPr/>
+          <p:nvPr/>
+        </p:nvSpPr>
+        <p:spPr>
+          <a:xfrm>
+            <a:off x="114859" y="1348507"/>
+            <a:ext cx="3001966" cy="4747493"/>
+          </a:xfrm>
+          <a:prstGeom prst="rect">
+            <a:avLst/>
+          </a:prstGeom>
+          <a:ln>
+            <a:solidFill>
+              <a:schemeClr val="accent6">
+                <a:lumMod val="50000"/>
+              </a:schemeClr>
+            </a:solidFill>
+          </a:ln>
+        </p:spPr>
+        <p:style>
+          <a:lnRef idx="2">
+            <a:schemeClr val="accent6"/>
+          </a:lnRef>
+          <a:fillRef idx="1">
+            <a:schemeClr val="lt1"/>
+          </a:fillRef>
+          <a:effectRef idx="0">
+            <a:schemeClr val="accent6"/>
+          </a:effectRef>
+          <a:fontRef idx="minor">
+            <a:schemeClr val="dk1"/>
+          </a:fontRef>
+        </p:style>
+        <p:txBody>
+          <a:bodyPr rtlCol="0" anchor="ctr"/>
+          <a:lstStyle/>
+          <a:p>
+            <a:pPr algn="ctr"/>
+            <a:endParaRPr lang="en-IN"/>
+          </a:p>
+        </p:txBody>
+      </p:sp>
+      <p:sp>
+        <p:nvSpPr>
+          <p:cNvPr id="10" name="TextBox 9">
+            <a:extLst>
+              <a:ext uri="{FF2B5EF4-FFF2-40B4-BE49-F238E27FC236}">
+                <a16:creationId xmlns:a16="http://schemas.microsoft.com/office/drawing/2014/main" id="{20227354-B7FC-44FC-A1F3-4F6F2E74898C}"/>
+              </a:ext>
+            </a:extLst>
+          </p:cNvPr>
+          <p:cNvSpPr txBox="1"/>
+          <p:nvPr/>
+        </p:nvSpPr>
+        <p:spPr>
+          <a:xfrm>
+            <a:off x="114859" y="1366844"/>
+            <a:ext cx="3001966" cy="369332"/>
+          </a:xfrm>
+          <a:prstGeom prst="rect">
+            <a:avLst/>
+          </a:prstGeom>
+          <a:solidFill>
+            <a:schemeClr val="accent1">
+              <a:lumMod val="60000"/>
+              <a:lumOff val="40000"/>
+            </a:schemeClr>
+          </a:solidFill>
+        </p:spPr>
+        <p:txBody>
+          <a:bodyPr wrap="square">
+            <a:spAutoFit/>
+          </a:bodyPr>
+          <a:lstStyle/>
+          <a:p>
+            <a:r>
+              <a:rPr lang="en-IN" dirty="0">
+                <a:solidFill>
+                  <a:schemeClr val="accent1">
+                    <a:lumMod val="50000"/>
+                  </a:schemeClr>
+                </a:solidFill>
+              </a:rPr>
+              <a:t>       THE CORE CHALLENGE</a:t>
+            </a:r>
+          </a:p>
+        </p:txBody>
+      </p:sp>
+      <p:sp>
+        <p:nvSpPr>
+          <p:cNvPr id="14" name="TextBox 13">
+            <a:extLst>
+              <a:ext uri="{FF2B5EF4-FFF2-40B4-BE49-F238E27FC236}">
+                <a16:creationId xmlns:a16="http://schemas.microsoft.com/office/drawing/2014/main" id="{05757F2B-5427-ACE8-D244-057A9FE38932}"/>
+              </a:ext>
+            </a:extLst>
+          </p:cNvPr>
+          <p:cNvSpPr txBox="1"/>
+          <p:nvPr/>
+        </p:nvSpPr>
+        <p:spPr>
+          <a:xfrm>
+            <a:off x="130389" y="1763192"/>
+            <a:ext cx="3001966" cy="738664"/>
+          </a:xfrm>
+          <a:prstGeom prst="rect">
+            <a:avLst/>
+          </a:prstGeom>
+          <a:noFill/>
+        </p:spPr>
+        <p:txBody>
+          <a:bodyPr wrap="square">
+            <a:spAutoFit/>
+          </a:bodyPr>
+          <a:lstStyle/>
+          <a:p>
+            <a:pPr>
+              <a:buNone/>
+            </a:pPr>
+            <a:r>
+              <a:rPr lang="en-IN" sz="1400" b="1" dirty="0"/>
+              <a:t>Rainfall ≠ Flood Location</a:t>
+            </a:r>
+          </a:p>
+          <a:p>
+            <a:pPr>
+              <a:buNone/>
+            </a:pPr>
+            <a:r>
+              <a:rPr lang="en-IN" sz="1400" dirty="0"/>
+              <a:t>Rainfall forecasts tell us how much rain may fall, not where streets will flood.</a:t>
+            </a:r>
+          </a:p>
+        </p:txBody>
+      </p:sp>
+      <p:cxnSp>
+        <p:nvCxnSpPr>
+          <p:cNvPr id="16" name="Straight Connector 15">
+            <a:extLst>
+              <a:ext uri="{FF2B5EF4-FFF2-40B4-BE49-F238E27FC236}">
+                <a16:creationId xmlns:a16="http://schemas.microsoft.com/office/drawing/2014/main" id="{73D02C81-4955-0B56-F94E-A9C0215DBC12}"/>
+              </a:ext>
+            </a:extLst>
+          </p:cNvPr>
+          <p:cNvCxnSpPr/>
+          <p:nvPr/>
+        </p:nvCxnSpPr>
+        <p:spPr>
+          <a:xfrm>
+            <a:off x="176978" y="2505299"/>
+            <a:ext cx="2733369" cy="0"/>
+          </a:xfrm>
+          <a:prstGeom prst="line">
+            <a:avLst/>
+          </a:prstGeom>
+          <a:ln>
+            <a:solidFill>
+              <a:schemeClr val="accent1">
+                <a:lumMod val="50000"/>
+              </a:schemeClr>
+            </a:solidFill>
+          </a:ln>
+        </p:spPr>
+        <p:style>
+          <a:lnRef idx="1">
+            <a:schemeClr val="accent1"/>
+          </a:lnRef>
+          <a:fillRef idx="0">
+            <a:schemeClr val="accent1"/>
+          </a:fillRef>
+          <a:effectRef idx="0">
+            <a:schemeClr val="accent1"/>
+          </a:effectRef>
+          <a:fontRef idx="minor">
+            <a:schemeClr val="tx1"/>
+          </a:fontRef>
+        </p:style>
+      </p:cxnSp>
+      <p:sp>
+        <p:nvSpPr>
+          <p:cNvPr id="18" name="TextBox 17">
+            <a:extLst>
+              <a:ext uri="{FF2B5EF4-FFF2-40B4-BE49-F238E27FC236}">
+                <a16:creationId xmlns:a16="http://schemas.microsoft.com/office/drawing/2014/main" id="{1ED3CBEA-7D8E-341F-17FC-5F57854B7701}"/>
+              </a:ext>
+            </a:extLst>
+          </p:cNvPr>
+          <p:cNvSpPr txBox="1"/>
+          <p:nvPr/>
+        </p:nvSpPr>
+        <p:spPr>
+          <a:xfrm>
+            <a:off x="975962" y="2531455"/>
+            <a:ext cx="2156393" cy="954107"/>
+          </a:xfrm>
+          <a:prstGeom prst="rect">
+            <a:avLst/>
+          </a:prstGeom>
+          <a:noFill/>
+        </p:spPr>
+        <p:txBody>
+          <a:bodyPr wrap="square">
+            <a:spAutoFit/>
+          </a:bodyPr>
+          <a:lstStyle/>
+          <a:p>
+            <a:r>
+              <a:rPr lang="en-IN" sz="1400" b="1" dirty="0"/>
+              <a:t>Micro-topography</a:t>
+            </a:r>
+            <a:br>
+              <a:rPr lang="en-IN" sz="1400" dirty="0"/>
+            </a:br>
+            <a:r>
+              <a:rPr lang="en-IN" sz="1400" dirty="0"/>
+              <a:t>Local elevation and depressions control water accumulation.</a:t>
+            </a:r>
+          </a:p>
+        </p:txBody>
+      </p:sp>
+      <p:pic>
+        <p:nvPicPr>
+          <p:cNvPr id="19" name="Picture 18">
+            <a:extLst>
+              <a:ext uri="{FF2B5EF4-FFF2-40B4-BE49-F238E27FC236}">
+                <a16:creationId xmlns:a16="http://schemas.microsoft.com/office/drawing/2014/main" id="{A7FD058B-122E-71CF-A1FF-EBAD181D34D4}"/>
+              </a:ext>
+            </a:extLst>
+          </p:cNvPr>
+          <p:cNvPicPr>
+            <a:picLocks noChangeAspect="1"/>
+          </p:cNvPicPr>
+          <p:nvPr/>
+        </p:nvPicPr>
+        <p:blipFill>
+          <a:blip r:embed="rId4"/>
+          <a:stretch>
+            <a:fillRect/>
+          </a:stretch>
+        </p:blipFill>
+        <p:spPr>
+          <a:xfrm>
+            <a:off x="55323" y="2431936"/>
+            <a:ext cx="1103846" cy="966935"/>
+          </a:xfrm>
+          <a:prstGeom prst="rect">
+            <a:avLst/>
+          </a:prstGeom>
+        </p:spPr>
+      </p:pic>
+      <p:sp>
+        <p:nvSpPr>
+          <p:cNvPr id="23" name="TextBox 22">
+            <a:extLst>
+              <a:ext uri="{FF2B5EF4-FFF2-40B4-BE49-F238E27FC236}">
+                <a16:creationId xmlns:a16="http://schemas.microsoft.com/office/drawing/2014/main" id="{A3FA840D-394B-9C5F-D1A8-FAF0C2089B79}"/>
+              </a:ext>
+            </a:extLst>
+          </p:cNvPr>
+          <p:cNvSpPr txBox="1"/>
+          <p:nvPr/>
+        </p:nvSpPr>
+        <p:spPr>
+          <a:xfrm>
+            <a:off x="932815" y="4194150"/>
+            <a:ext cx="2184010" cy="738664"/>
+          </a:xfrm>
+          <a:prstGeom prst="rect">
+            <a:avLst/>
+          </a:prstGeom>
+          <a:noFill/>
+        </p:spPr>
+        <p:txBody>
+          <a:bodyPr wrap="square">
+            <a:spAutoFit/>
+          </a:bodyPr>
+          <a:lstStyle/>
+          <a:p>
+            <a:r>
+              <a:rPr lang="en-IN" sz="1400" b="1" dirty="0"/>
+              <a:t>Drainage hydraulics</a:t>
+            </a:r>
+            <a:br>
+              <a:rPr lang="en-IN" sz="1400" dirty="0"/>
+            </a:br>
+            <a:r>
+              <a:rPr lang="en-IN" sz="1400" dirty="0"/>
+              <a:t>Network capacity and connectivity regulate</a:t>
+            </a:r>
+            <a:endParaRPr lang="en-IN" dirty="0"/>
+          </a:p>
+        </p:txBody>
+      </p:sp>
+      <p:sp>
+        <p:nvSpPr>
+          <p:cNvPr id="25" name="TextBox 24">
+            <a:extLst>
+              <a:ext uri="{FF2B5EF4-FFF2-40B4-BE49-F238E27FC236}">
+                <a16:creationId xmlns:a16="http://schemas.microsoft.com/office/drawing/2014/main" id="{1C27B511-4AE0-E99A-FC1B-5019C6582D21}"/>
+              </a:ext>
+            </a:extLst>
+          </p:cNvPr>
+          <p:cNvSpPr txBox="1"/>
+          <p:nvPr/>
+        </p:nvSpPr>
+        <p:spPr>
+          <a:xfrm>
+            <a:off x="932815" y="3459130"/>
+            <a:ext cx="2305665" cy="800219"/>
+          </a:xfrm>
+          <a:prstGeom prst="rect">
+            <a:avLst/>
+          </a:prstGeom>
+          <a:noFill/>
+        </p:spPr>
+        <p:txBody>
+          <a:bodyPr wrap="square">
+            <a:spAutoFit/>
+          </a:bodyPr>
+          <a:lstStyle/>
+          <a:p>
+            <a:r>
+              <a:rPr lang="en-IN" sz="1400" b="1" dirty="0"/>
+              <a:t>Surface characteristics</a:t>
+            </a:r>
+            <a:br>
+              <a:rPr lang="en-IN" sz="1400" dirty="0"/>
+            </a:br>
+            <a:r>
+              <a:rPr lang="en-IN" sz="1400" dirty="0"/>
+              <a:t>Impervious surfaces increase runoff generation</a:t>
+            </a:r>
+            <a:r>
+              <a:rPr lang="en-IN" dirty="0"/>
+              <a:t>.</a:t>
+            </a:r>
+          </a:p>
+        </p:txBody>
+      </p:sp>
+      <p:sp>
+        <p:nvSpPr>
+          <p:cNvPr id="27" name="TextBox 26">
+            <a:extLst>
+              <a:ext uri="{FF2B5EF4-FFF2-40B4-BE49-F238E27FC236}">
+                <a16:creationId xmlns:a16="http://schemas.microsoft.com/office/drawing/2014/main" id="{C6E0E688-AB02-0581-9CA7-35EEE0A18BC9}"/>
+              </a:ext>
+            </a:extLst>
+          </p:cNvPr>
+          <p:cNvSpPr txBox="1"/>
+          <p:nvPr/>
+        </p:nvSpPr>
+        <p:spPr>
+          <a:xfrm>
+            <a:off x="911158" y="5062479"/>
+            <a:ext cx="2286000" cy="954107"/>
+          </a:xfrm>
+          <a:prstGeom prst="rect">
+            <a:avLst/>
+          </a:prstGeom>
+          <a:noFill/>
+        </p:spPr>
+        <p:txBody>
+          <a:bodyPr wrap="square">
+            <a:spAutoFit/>
+          </a:bodyPr>
+          <a:lstStyle/>
+          <a:p>
+            <a:r>
+              <a:rPr lang="en-IN" sz="1400" b="1" dirty="0"/>
+              <a:t> Blockage / surcharge</a:t>
+            </a:r>
+            <a:br>
+              <a:rPr lang="en-IN" sz="1400" dirty="0"/>
+            </a:br>
+            <a:r>
+              <a:rPr lang="en-IN" sz="1400" dirty="0"/>
+              <a:t>Restricted flow causes surcharge, backflow and surface overflow.</a:t>
+            </a:r>
+          </a:p>
+        </p:txBody>
+      </p:sp>
+      <p:sp>
+        <p:nvSpPr>
+          <p:cNvPr id="28" name="TextBox 27">
+            <a:extLst>
+              <a:ext uri="{FF2B5EF4-FFF2-40B4-BE49-F238E27FC236}">
+                <a16:creationId xmlns:a16="http://schemas.microsoft.com/office/drawing/2014/main" id="{6920B93D-E9A5-C64D-8ECD-3EE91246AC65}"/>
+              </a:ext>
+            </a:extLst>
+          </p:cNvPr>
+          <p:cNvSpPr txBox="1"/>
+          <p:nvPr/>
+        </p:nvSpPr>
+        <p:spPr>
+          <a:xfrm>
+            <a:off x="932815" y="4805941"/>
+            <a:ext cx="1105880" cy="307777"/>
+          </a:xfrm>
+          <a:prstGeom prst="rect">
+            <a:avLst/>
+          </a:prstGeom>
+          <a:noFill/>
+        </p:spPr>
+        <p:txBody>
+          <a:bodyPr wrap="none" rtlCol="0">
+            <a:spAutoFit/>
+          </a:bodyPr>
+          <a:lstStyle/>
+          <a:p>
+            <a:r>
+              <a:rPr lang="en-IN" sz="1400" dirty="0"/>
+              <a:t>Conveyance.</a:t>
+            </a:r>
+          </a:p>
+        </p:txBody>
+      </p:sp>
+      <p:pic>
+        <p:nvPicPr>
+          <p:cNvPr id="29" name="Picture 28">
+            <a:extLst>
+              <a:ext uri="{FF2B5EF4-FFF2-40B4-BE49-F238E27FC236}">
+                <a16:creationId xmlns:a16="http://schemas.microsoft.com/office/drawing/2014/main" id="{927A3C70-8564-A3FC-774E-1A802AB71059}"/>
+              </a:ext>
+            </a:extLst>
+          </p:cNvPr>
+          <p:cNvPicPr>
+            <a:picLocks noChangeAspect="1"/>
+          </p:cNvPicPr>
+          <p:nvPr/>
+        </p:nvPicPr>
+        <p:blipFill>
+          <a:blip r:embed="rId5"/>
+          <a:stretch>
+            <a:fillRect/>
+          </a:stretch>
+        </p:blipFill>
+        <p:spPr>
+          <a:xfrm>
+            <a:off x="34526" y="3385766"/>
+            <a:ext cx="1103846" cy="966935"/>
+          </a:xfrm>
+          <a:prstGeom prst="rect">
+            <a:avLst/>
+          </a:prstGeom>
+        </p:spPr>
+      </p:pic>
+      <p:pic>
+        <p:nvPicPr>
+          <p:cNvPr id="30" name="Picture 29">
+            <a:extLst>
+              <a:ext uri="{FF2B5EF4-FFF2-40B4-BE49-F238E27FC236}">
+                <a16:creationId xmlns:a16="http://schemas.microsoft.com/office/drawing/2014/main" id="{E9BA0A1F-17D7-A13A-C833-E9F2108D6DAB}"/>
+              </a:ext>
+            </a:extLst>
+          </p:cNvPr>
+          <p:cNvPicPr>
+            <a:picLocks noChangeAspect="1"/>
+          </p:cNvPicPr>
+          <p:nvPr/>
+        </p:nvPicPr>
+        <p:blipFill>
+          <a:blip r:embed="rId6"/>
+          <a:stretch>
+            <a:fillRect/>
+          </a:stretch>
+        </p:blipFill>
+        <p:spPr>
+          <a:xfrm>
+            <a:off x="150484" y="4197427"/>
+            <a:ext cx="913524" cy="800219"/>
+          </a:xfrm>
+          <a:prstGeom prst="rect">
+            <a:avLst/>
+          </a:prstGeom>
+        </p:spPr>
+      </p:pic>
+      <p:pic>
+        <p:nvPicPr>
+          <p:cNvPr id="31" name="Picture 30">
+            <a:extLst>
+              <a:ext uri="{FF2B5EF4-FFF2-40B4-BE49-F238E27FC236}">
+                <a16:creationId xmlns:a16="http://schemas.microsoft.com/office/drawing/2014/main" id="{C37FA3BA-A65D-6430-5537-33A5835BF282}"/>
+              </a:ext>
+            </a:extLst>
+          </p:cNvPr>
+          <p:cNvPicPr>
+            <a:picLocks noChangeAspect="1"/>
+          </p:cNvPicPr>
+          <p:nvPr/>
+        </p:nvPicPr>
+        <p:blipFill>
+          <a:blip r:embed="rId7"/>
+          <a:stretch>
+            <a:fillRect/>
+          </a:stretch>
+        </p:blipFill>
+        <p:spPr>
+          <a:xfrm>
+            <a:off x="176978" y="5110073"/>
+            <a:ext cx="843255" cy="738665"/>
+          </a:xfrm>
+          <a:prstGeom prst="rect">
+            <a:avLst/>
+          </a:prstGeom>
+        </p:spPr>
+      </p:pic>
+      <p:cxnSp>
+        <p:nvCxnSpPr>
+          <p:cNvPr id="32" name="Straight Connector 31">
+            <a:extLst>
+              <a:ext uri="{FF2B5EF4-FFF2-40B4-BE49-F238E27FC236}">
+                <a16:creationId xmlns:a16="http://schemas.microsoft.com/office/drawing/2014/main" id="{4FA60543-637E-D938-4220-C351517823EA}"/>
+              </a:ext>
+            </a:extLst>
+          </p:cNvPr>
+          <p:cNvCxnSpPr/>
+          <p:nvPr/>
+        </p:nvCxnSpPr>
+        <p:spPr>
+          <a:xfrm>
+            <a:off x="237559" y="3485562"/>
+            <a:ext cx="2733369" cy="0"/>
+          </a:xfrm>
+          <a:prstGeom prst="line">
+            <a:avLst/>
+          </a:prstGeom>
+          <a:ln>
+            <a:solidFill>
+              <a:schemeClr val="accent1">
+                <a:lumMod val="50000"/>
+              </a:schemeClr>
+            </a:solidFill>
+          </a:ln>
+        </p:spPr>
+        <p:style>
+          <a:lnRef idx="1">
+            <a:schemeClr val="accent1"/>
+          </a:lnRef>
+          <a:fillRef idx="0">
+            <a:schemeClr val="accent1"/>
+          </a:fillRef>
+          <a:effectRef idx="0">
+            <a:schemeClr val="accent1"/>
+          </a:effectRef>
+          <a:fontRef idx="minor">
+            <a:schemeClr val="tx1"/>
+          </a:fontRef>
+        </p:style>
+      </p:cxnSp>
+      <p:cxnSp>
+        <p:nvCxnSpPr>
+          <p:cNvPr id="33" name="Straight Connector 32">
+            <a:extLst>
+              <a:ext uri="{FF2B5EF4-FFF2-40B4-BE49-F238E27FC236}">
+                <a16:creationId xmlns:a16="http://schemas.microsoft.com/office/drawing/2014/main" id="{0255EAF4-3FF0-CBBA-D76B-D525496D5E93}"/>
+              </a:ext>
+            </a:extLst>
+          </p:cNvPr>
+          <p:cNvCxnSpPr/>
+          <p:nvPr/>
+        </p:nvCxnSpPr>
+        <p:spPr>
+          <a:xfrm>
+            <a:off x="237558" y="4194150"/>
+            <a:ext cx="2733369" cy="0"/>
+          </a:xfrm>
+          <a:prstGeom prst="line">
+            <a:avLst/>
+          </a:prstGeom>
+          <a:ln>
+            <a:solidFill>
+              <a:schemeClr val="accent1">
+                <a:lumMod val="50000"/>
+              </a:schemeClr>
+            </a:solidFill>
+          </a:ln>
+        </p:spPr>
+        <p:style>
+          <a:lnRef idx="1">
+            <a:schemeClr val="accent1"/>
+          </a:lnRef>
+          <a:fillRef idx="0">
+            <a:schemeClr val="accent1"/>
+          </a:fillRef>
+          <a:effectRef idx="0">
+            <a:schemeClr val="accent1"/>
+          </a:effectRef>
+          <a:fontRef idx="minor">
+            <a:schemeClr val="tx1"/>
+          </a:fontRef>
+        </p:style>
+      </p:cxnSp>
+      <p:cxnSp>
+        <p:nvCxnSpPr>
+          <p:cNvPr id="34" name="Straight Connector 33">
+            <a:extLst>
+              <a:ext uri="{FF2B5EF4-FFF2-40B4-BE49-F238E27FC236}">
+                <a16:creationId xmlns:a16="http://schemas.microsoft.com/office/drawing/2014/main" id="{7E0EC8AD-E75D-93B5-FA3C-C666E7B95710}"/>
+              </a:ext>
+            </a:extLst>
+          </p:cNvPr>
+          <p:cNvCxnSpPr/>
+          <p:nvPr/>
+        </p:nvCxnSpPr>
+        <p:spPr>
+          <a:xfrm>
+            <a:off x="237557" y="5080865"/>
+            <a:ext cx="2733369" cy="0"/>
+          </a:xfrm>
+          <a:prstGeom prst="line">
+            <a:avLst/>
+          </a:prstGeom>
+          <a:ln>
+            <a:solidFill>
+              <a:schemeClr val="accent1">
+                <a:lumMod val="50000"/>
+              </a:schemeClr>
+            </a:solidFill>
+          </a:ln>
+        </p:spPr>
+        <p:style>
+          <a:lnRef idx="1">
+            <a:schemeClr val="accent1"/>
+          </a:lnRef>
+          <a:fillRef idx="0">
+            <a:schemeClr val="accent1"/>
+          </a:fillRef>
+          <a:effectRef idx="0">
+            <a:schemeClr val="accent1"/>
+          </a:effectRef>
+          <a:fontRef idx="minor">
+            <a:schemeClr val="tx1"/>
+          </a:fontRef>
+        </p:style>
+      </p:cxnSp>
+      <p:sp>
+        <p:nvSpPr>
+          <p:cNvPr id="35" name="TextBox 34">
+            <a:extLst>
+              <a:ext uri="{FF2B5EF4-FFF2-40B4-BE49-F238E27FC236}">
+                <a16:creationId xmlns:a16="http://schemas.microsoft.com/office/drawing/2014/main" id="{16E855F2-8C1A-8C96-47CE-80E29DC57B01}"/>
+              </a:ext>
+            </a:extLst>
+          </p:cNvPr>
+          <p:cNvSpPr txBox="1"/>
+          <p:nvPr/>
+        </p:nvSpPr>
+        <p:spPr>
+          <a:xfrm>
+            <a:off x="9105519" y="1346925"/>
+            <a:ext cx="2910220" cy="369332"/>
+          </a:xfrm>
+          <a:prstGeom prst="rect">
+            <a:avLst/>
+          </a:prstGeom>
+          <a:solidFill>
+            <a:schemeClr val="accent1">
+              <a:lumMod val="60000"/>
+              <a:lumOff val="40000"/>
+            </a:schemeClr>
+          </a:solidFill>
+        </p:spPr>
+        <p:txBody>
+          <a:bodyPr wrap="none" rtlCol="0">
+            <a:spAutoFit/>
+          </a:bodyPr>
+          <a:lstStyle/>
+          <a:p>
+            <a:r>
+              <a:rPr lang="en-IN" dirty="0"/>
+              <a:t>WHAT THE SYSTEM DELIVERS</a:t>
+            </a:r>
+          </a:p>
+        </p:txBody>
+      </p:sp>
+      <p:sp>
+        <p:nvSpPr>
+          <p:cNvPr id="36" name="Rectangle: Rounded Corners 35">
+            <a:extLst>
+              <a:ext uri="{FF2B5EF4-FFF2-40B4-BE49-F238E27FC236}">
+                <a16:creationId xmlns:a16="http://schemas.microsoft.com/office/drawing/2014/main" id="{434AB93D-6328-E1D4-9F68-CBF4801186C1}"/>
+              </a:ext>
+            </a:extLst>
+          </p:cNvPr>
+          <p:cNvSpPr/>
+          <p:nvPr/>
+        </p:nvSpPr>
+        <p:spPr>
+          <a:xfrm>
+            <a:off x="9059647" y="1786388"/>
+            <a:ext cx="3001964" cy="1045310"/>
+          </a:xfrm>
+          <a:prstGeom prst="roundRect">
+            <a:avLst/>
+          </a:prstGeom>
+        </p:spPr>
+        <p:style>
+          <a:lnRef idx="2">
+            <a:schemeClr val="accent6"/>
+          </a:lnRef>
+          <a:fillRef idx="1">
+            <a:schemeClr val="lt1"/>
+          </a:fillRef>
+          <a:effectRef idx="0">
+            <a:schemeClr val="accent6"/>
+          </a:effectRef>
+          <a:fontRef idx="minor">
+            <a:schemeClr val="dk1"/>
+          </a:fontRef>
+        </p:style>
+        <p:txBody>
+          <a:bodyPr rtlCol="0" anchor="ctr"/>
+          <a:lstStyle/>
+          <a:p>
+            <a:pPr algn="ctr"/>
+            <a:endParaRPr lang="en-IN"/>
+          </a:p>
+        </p:txBody>
+      </p:sp>
+      <p:sp>
+        <p:nvSpPr>
+          <p:cNvPr id="38" name="Rectangle: Rounded Corners 37">
+            <a:extLst>
+              <a:ext uri="{FF2B5EF4-FFF2-40B4-BE49-F238E27FC236}">
+                <a16:creationId xmlns:a16="http://schemas.microsoft.com/office/drawing/2014/main" id="{CAEF7F5E-EF46-06DE-3882-A3320B81AE5C}"/>
+              </a:ext>
+            </a:extLst>
+          </p:cNvPr>
+          <p:cNvSpPr/>
+          <p:nvPr/>
+        </p:nvSpPr>
+        <p:spPr>
+          <a:xfrm>
+            <a:off x="9059647" y="2926512"/>
+            <a:ext cx="3017494" cy="1024199"/>
+          </a:xfrm>
+          <a:prstGeom prst="roundRect">
+            <a:avLst/>
+          </a:prstGeom>
+        </p:spPr>
+        <p:style>
+          <a:lnRef idx="2">
+            <a:schemeClr val="accent6"/>
+          </a:lnRef>
+          <a:fillRef idx="1">
+            <a:schemeClr val="lt1"/>
+          </a:fillRef>
+          <a:effectRef idx="0">
+            <a:schemeClr val="accent6"/>
+          </a:effectRef>
+          <a:fontRef idx="minor">
+            <a:schemeClr val="dk1"/>
+          </a:fontRef>
+        </p:style>
+        <p:txBody>
+          <a:bodyPr rtlCol="0" anchor="ctr"/>
+          <a:lstStyle/>
+          <a:p>
+            <a:pPr algn="ctr"/>
+            <a:endParaRPr lang="en-IN" dirty="0"/>
+          </a:p>
+        </p:txBody>
+      </p:sp>
+      <p:sp>
+        <p:nvSpPr>
+          <p:cNvPr id="40" name="Rectangle: Rounded Corners 39">
+            <a:extLst>
+              <a:ext uri="{FF2B5EF4-FFF2-40B4-BE49-F238E27FC236}">
+                <a16:creationId xmlns:a16="http://schemas.microsoft.com/office/drawing/2014/main" id="{810FE4A2-6337-3A38-459D-692333A570FE}"/>
+              </a:ext>
+            </a:extLst>
+          </p:cNvPr>
+          <p:cNvSpPr/>
+          <p:nvPr/>
+        </p:nvSpPr>
+        <p:spPr>
+          <a:xfrm>
+            <a:off x="9021540" y="5062479"/>
+            <a:ext cx="2993482" cy="1033521"/>
+          </a:xfrm>
+          <a:prstGeom prst="roundRect">
+            <a:avLst/>
+          </a:prstGeom>
+        </p:spPr>
+        <p:style>
+          <a:lnRef idx="2">
+            <a:schemeClr val="accent6"/>
+          </a:lnRef>
+          <a:fillRef idx="1">
+            <a:schemeClr val="lt1"/>
+          </a:fillRef>
+          <a:effectRef idx="0">
+            <a:schemeClr val="accent6"/>
+          </a:effectRef>
+          <a:fontRef idx="minor">
+            <a:schemeClr val="dk1"/>
+          </a:fontRef>
+        </p:style>
+        <p:txBody>
+          <a:bodyPr rtlCol="0" anchor="ctr"/>
+          <a:lstStyle/>
+          <a:p>
+            <a:pPr algn="ctr"/>
+            <a:endParaRPr lang="en-IN"/>
+          </a:p>
+        </p:txBody>
+      </p:sp>
+      <p:sp>
+        <p:nvSpPr>
+          <p:cNvPr id="42" name="Rectangle: Rounded Corners 41">
+            <a:extLst>
+              <a:ext uri="{FF2B5EF4-FFF2-40B4-BE49-F238E27FC236}">
+                <a16:creationId xmlns:a16="http://schemas.microsoft.com/office/drawing/2014/main" id="{358E911C-1483-4C90-18C1-7F152A78BC41}"/>
+              </a:ext>
+            </a:extLst>
+          </p:cNvPr>
+          <p:cNvSpPr/>
+          <p:nvPr/>
+        </p:nvSpPr>
+        <p:spPr>
+          <a:xfrm>
+            <a:off x="9021539" y="4017169"/>
+            <a:ext cx="3040071" cy="980478"/>
+          </a:xfrm>
+          <a:prstGeom prst="roundRect">
+            <a:avLst/>
+          </a:prstGeom>
+        </p:spPr>
+        <p:style>
+          <a:lnRef idx="2">
+            <a:schemeClr val="accent6"/>
+          </a:lnRef>
+          <a:fillRef idx="1">
+            <a:schemeClr val="lt1"/>
+          </a:fillRef>
+          <a:effectRef idx="0">
+            <a:schemeClr val="accent6"/>
+          </a:effectRef>
+          <a:fontRef idx="minor">
+            <a:schemeClr val="dk1"/>
+          </a:fontRef>
+        </p:style>
+        <p:txBody>
+          <a:bodyPr rtlCol="0" anchor="ctr"/>
+          <a:lstStyle/>
+          <a:p>
+            <a:pPr algn="ctr"/>
+            <a:endParaRPr lang="en-IN"/>
+          </a:p>
+        </p:txBody>
+      </p:sp>
+      <p:sp>
+        <p:nvSpPr>
+          <p:cNvPr id="44" name="TextBox 43">
+            <a:extLst>
+              <a:ext uri="{FF2B5EF4-FFF2-40B4-BE49-F238E27FC236}">
+                <a16:creationId xmlns:a16="http://schemas.microsoft.com/office/drawing/2014/main" id="{A0D67035-A661-2B88-6469-4FD467610C69}"/>
+              </a:ext>
+            </a:extLst>
+          </p:cNvPr>
+          <p:cNvSpPr txBox="1"/>
+          <p:nvPr/>
+        </p:nvSpPr>
+        <p:spPr>
+          <a:xfrm>
+            <a:off x="9660194" y="1821546"/>
+            <a:ext cx="6617108" cy="954107"/>
+          </a:xfrm>
+          <a:prstGeom prst="rect">
+            <a:avLst/>
+          </a:prstGeom>
+          <a:noFill/>
+        </p:spPr>
+        <p:txBody>
+          <a:bodyPr wrap="square">
+            <a:spAutoFit/>
+          </a:bodyPr>
+          <a:lstStyle/>
+          <a:p>
+            <a:pPr>
+              <a:buNone/>
+            </a:pPr>
+            <a:r>
+              <a:rPr lang="en-IN" sz="1400" b="1" dirty="0"/>
+              <a:t>A — FLOOD INTELLIGENCE</a:t>
+            </a:r>
+          </a:p>
+          <a:p>
+            <a:pPr lvl="0"/>
+            <a:r>
+              <a:rPr lang="en-IN" sz="1400" dirty="0"/>
+              <a:t>-Street-level water depth </a:t>
+            </a:r>
+          </a:p>
+          <a:p>
+            <a:pPr lvl="0"/>
+            <a:r>
+              <a:rPr lang="en-IN" sz="1400" dirty="0"/>
+              <a:t>-Flood extent &amp; accumulation </a:t>
+            </a:r>
+          </a:p>
+          <a:p>
+            <a:pPr lvl="0"/>
+            <a:r>
+              <a:rPr lang="en-IN" sz="1400" dirty="0"/>
+              <a:t>-Time-evolving flood risk</a:t>
+            </a:r>
+          </a:p>
+        </p:txBody>
+      </p:sp>
+      <p:sp>
+        <p:nvSpPr>
+          <p:cNvPr id="46" name="TextBox 45">
+            <a:extLst>
+              <a:ext uri="{FF2B5EF4-FFF2-40B4-BE49-F238E27FC236}">
+                <a16:creationId xmlns:a16="http://schemas.microsoft.com/office/drawing/2014/main" id="{3D4E5036-BD9F-A858-A209-F31A901F3AE5}"/>
+              </a:ext>
+            </a:extLst>
+          </p:cNvPr>
+          <p:cNvSpPr txBox="1"/>
+          <p:nvPr/>
+        </p:nvSpPr>
+        <p:spPr>
+          <a:xfrm>
+            <a:off x="9660194" y="2951946"/>
+            <a:ext cx="8139164" cy="954107"/>
+          </a:xfrm>
+          <a:prstGeom prst="rect">
+            <a:avLst/>
+          </a:prstGeom>
+          <a:noFill/>
+        </p:spPr>
+        <p:txBody>
+          <a:bodyPr wrap="square">
+            <a:spAutoFit/>
+          </a:bodyPr>
+          <a:lstStyle/>
+          <a:p>
+            <a:pPr>
+              <a:buNone/>
+            </a:pPr>
+            <a:r>
+              <a:rPr lang="en-IN" sz="1400" b="1" dirty="0"/>
+              <a:t>B — DRAINAGE INTELLIGENCE</a:t>
+            </a:r>
+          </a:p>
+          <a:p>
+            <a:pPr lvl="0"/>
+            <a:r>
+              <a:rPr lang="en-IN" sz="1400" dirty="0"/>
+              <a:t>-Node surcharge </a:t>
+            </a:r>
+          </a:p>
+          <a:p>
+            <a:pPr lvl="0"/>
+            <a:r>
+              <a:rPr lang="en-IN" sz="1400" dirty="0"/>
+              <a:t>-Capacity utilisation </a:t>
+            </a:r>
+          </a:p>
+          <a:p>
+            <a:pPr lvl="0"/>
+            <a:r>
+              <a:rPr lang="en-IN" sz="1400" dirty="0"/>
+              <a:t>-Pipe stress</a:t>
+            </a:r>
+          </a:p>
+        </p:txBody>
+      </p:sp>
+      <p:sp>
+        <p:nvSpPr>
+          <p:cNvPr id="48" name="TextBox 47">
+            <a:extLst>
+              <a:ext uri="{FF2B5EF4-FFF2-40B4-BE49-F238E27FC236}">
+                <a16:creationId xmlns:a16="http://schemas.microsoft.com/office/drawing/2014/main" id="{8A74A40D-EF34-7108-54C2-E3EE20E61CDD}"/>
+              </a:ext>
+            </a:extLst>
+          </p:cNvPr>
+          <p:cNvSpPr txBox="1"/>
+          <p:nvPr/>
+        </p:nvSpPr>
+        <p:spPr>
+          <a:xfrm>
+            <a:off x="9619769" y="3989331"/>
+            <a:ext cx="2350098" cy="954107"/>
+          </a:xfrm>
+          <a:prstGeom prst="rect">
+            <a:avLst/>
+          </a:prstGeom>
+          <a:noFill/>
+        </p:spPr>
+        <p:txBody>
+          <a:bodyPr wrap="square">
+            <a:spAutoFit/>
+          </a:bodyPr>
+          <a:lstStyle/>
+          <a:p>
+            <a:pPr>
+              <a:buNone/>
+            </a:pPr>
+            <a:r>
+              <a:rPr lang="en-IN" sz="1400" b="1" dirty="0"/>
+              <a:t>C — DECISION SUPPORT</a:t>
+            </a:r>
+          </a:p>
+          <a:p>
+            <a:pPr lvl="0"/>
+            <a:r>
+              <a:rPr lang="en-IN" sz="1400" dirty="0"/>
+              <a:t>-Flood-aware route planning </a:t>
+            </a:r>
+          </a:p>
+          <a:p>
+            <a:pPr lvl="0"/>
+            <a:r>
+              <a:rPr lang="en-IN" sz="1400" dirty="0"/>
+              <a:t>-Risk-aware alerts </a:t>
+            </a:r>
+          </a:p>
+          <a:p>
+            <a:pPr lvl="0"/>
+            <a:r>
+              <a:rPr lang="en-IN" sz="1400" dirty="0"/>
+              <a:t>-Citizen issue reporting</a:t>
+            </a:r>
+          </a:p>
+        </p:txBody>
+      </p:sp>
+      <p:sp>
+        <p:nvSpPr>
+          <p:cNvPr id="50" name="TextBox 49">
+            <a:extLst>
+              <a:ext uri="{FF2B5EF4-FFF2-40B4-BE49-F238E27FC236}">
+                <a16:creationId xmlns:a16="http://schemas.microsoft.com/office/drawing/2014/main" id="{29B4CB8B-CBEA-61AF-5EA8-F2818855B273}"/>
+              </a:ext>
+            </a:extLst>
+          </p:cNvPr>
+          <p:cNvSpPr txBox="1"/>
+          <p:nvPr/>
+        </p:nvSpPr>
+        <p:spPr>
+          <a:xfrm>
+            <a:off x="9619769" y="5110073"/>
+            <a:ext cx="2467900" cy="954107"/>
+          </a:xfrm>
+          <a:prstGeom prst="rect">
+            <a:avLst/>
+          </a:prstGeom>
+          <a:noFill/>
+        </p:spPr>
+        <p:txBody>
+          <a:bodyPr wrap="square">
+            <a:spAutoFit/>
+          </a:bodyPr>
+          <a:lstStyle/>
+          <a:p>
+            <a:pPr>
+              <a:buNone/>
+            </a:pPr>
+            <a:r>
+              <a:rPr lang="en-IN" sz="1400" b="1" dirty="0"/>
+              <a:t>LEAD TIME</a:t>
+            </a:r>
+          </a:p>
+          <a:p>
+            <a:pPr>
+              <a:buNone/>
+            </a:pPr>
+            <a:r>
+              <a:rPr lang="en-IN" sz="1400" b="1" dirty="0"/>
+              <a:t>0 – 3 HOURS</a:t>
+            </a:r>
+          </a:p>
+          <a:p>
+            <a:pPr>
+              <a:buNone/>
+            </a:pPr>
+            <a:r>
+              <a:rPr lang="en-IN" sz="1400" dirty="0" err="1"/>
+              <a:t>Spatio</a:t>
+            </a:r>
+            <a:r>
+              <a:rPr lang="en-IN" sz="1400" dirty="0"/>
+              <a:t>-temporal flood nowcast at street/intersection level.</a:t>
+            </a:r>
+          </a:p>
+        </p:txBody>
+      </p:sp>
+      <p:pic>
+        <p:nvPicPr>
+          <p:cNvPr id="51" name="Picture 50">
+            <a:extLst>
+              <a:ext uri="{FF2B5EF4-FFF2-40B4-BE49-F238E27FC236}">
+                <a16:creationId xmlns:a16="http://schemas.microsoft.com/office/drawing/2014/main" id="{18693EE3-4E0C-6E65-A439-69DE16059115}"/>
+              </a:ext>
+            </a:extLst>
+          </p:cNvPr>
+          <p:cNvPicPr>
+            <a:picLocks noChangeAspect="1"/>
+          </p:cNvPicPr>
+          <p:nvPr/>
+        </p:nvPicPr>
+        <p:blipFill>
+          <a:blip r:embed="rId8"/>
+          <a:stretch>
+            <a:fillRect/>
+          </a:stretch>
+        </p:blipFill>
+        <p:spPr>
+          <a:xfrm>
+            <a:off x="8967569" y="1996651"/>
+            <a:ext cx="843254" cy="738664"/>
+          </a:xfrm>
+          <a:prstGeom prst="rect">
+            <a:avLst/>
+          </a:prstGeom>
+        </p:spPr>
+      </p:pic>
+      <p:pic>
+        <p:nvPicPr>
+          <p:cNvPr id="52" name="Picture 51">
+            <a:extLst>
+              <a:ext uri="{FF2B5EF4-FFF2-40B4-BE49-F238E27FC236}">
+                <a16:creationId xmlns:a16="http://schemas.microsoft.com/office/drawing/2014/main" id="{320285E3-224A-69D7-8832-A5544778745B}"/>
+              </a:ext>
+            </a:extLst>
+          </p:cNvPr>
+          <p:cNvPicPr>
+            <a:picLocks noChangeAspect="1"/>
+          </p:cNvPicPr>
+          <p:nvPr/>
+        </p:nvPicPr>
+        <p:blipFill>
+          <a:blip r:embed="rId9"/>
+          <a:stretch>
+            <a:fillRect/>
+          </a:stretch>
+        </p:blipFill>
+        <p:spPr>
+          <a:xfrm>
+            <a:off x="9066606" y="3207328"/>
+            <a:ext cx="744217" cy="651911"/>
+          </a:xfrm>
+          <a:prstGeom prst="rect">
+            <a:avLst/>
+          </a:prstGeom>
+        </p:spPr>
+      </p:pic>
+      <p:pic>
+        <p:nvPicPr>
+          <p:cNvPr id="54" name="Picture 53">
+            <a:extLst>
+              <a:ext uri="{FF2B5EF4-FFF2-40B4-BE49-F238E27FC236}">
+                <a16:creationId xmlns:a16="http://schemas.microsoft.com/office/drawing/2014/main" id="{3DF5EDBD-772B-7FDE-5B4D-B9B733A6731C}"/>
+              </a:ext>
+            </a:extLst>
+          </p:cNvPr>
+          <p:cNvPicPr>
+            <a:picLocks noChangeAspect="1"/>
+          </p:cNvPicPr>
+          <p:nvPr/>
+        </p:nvPicPr>
+        <p:blipFill>
+          <a:blip r:embed="rId10"/>
+          <a:stretch>
+            <a:fillRect/>
+          </a:stretch>
+        </p:blipFill>
+        <p:spPr>
+          <a:xfrm>
+            <a:off x="8948893" y="5210864"/>
+            <a:ext cx="841069" cy="736750"/>
+          </a:xfrm>
+          <a:prstGeom prst="rect">
+            <a:avLst/>
+          </a:prstGeom>
+        </p:spPr>
+      </p:pic>
+      <p:pic>
+        <p:nvPicPr>
+          <p:cNvPr id="56" name="Picture 55">
+            <a:extLst>
+              <a:ext uri="{FF2B5EF4-FFF2-40B4-BE49-F238E27FC236}">
+                <a16:creationId xmlns:a16="http://schemas.microsoft.com/office/drawing/2014/main" id="{5278270F-FDEA-1C6F-5561-CD38B3E9CB9A}"/>
+              </a:ext>
+            </a:extLst>
+          </p:cNvPr>
+          <p:cNvPicPr>
+            <a:picLocks noChangeAspect="1"/>
+          </p:cNvPicPr>
+          <p:nvPr/>
+        </p:nvPicPr>
+        <p:blipFill>
+          <a:blip r:embed="rId11"/>
+          <a:stretch>
+            <a:fillRect/>
+          </a:stretch>
+        </p:blipFill>
+        <p:spPr>
+          <a:xfrm>
+            <a:off x="2953494" y="1782595"/>
+            <a:ext cx="6078919" cy="5783296"/>
+          </a:xfrm>
+          <a:prstGeom prst="rect">
+            <a:avLst/>
+          </a:prstGeom>
+        </p:spPr>
+      </p:pic>
+      <p:cxnSp>
+        <p:nvCxnSpPr>
+          <p:cNvPr id="58" name="Straight Connector 57">
+            <a:extLst>
+              <a:ext uri="{FF2B5EF4-FFF2-40B4-BE49-F238E27FC236}">
+                <a16:creationId xmlns:a16="http://schemas.microsoft.com/office/drawing/2014/main" id="{1EBC1EEF-EA5F-D2F4-4A4F-78AAE5BE42B4}"/>
+              </a:ext>
+            </a:extLst>
+          </p:cNvPr>
+          <p:cNvCxnSpPr>
+            <a:cxnSpLocks/>
+          </p:cNvCxnSpPr>
+          <p:nvPr/>
+        </p:nvCxnSpPr>
+        <p:spPr>
+          <a:xfrm>
+            <a:off x="4672484" y="2566391"/>
+            <a:ext cx="0" cy="1631068"/>
+          </a:xfrm>
+          <a:prstGeom prst="line">
+            <a:avLst/>
+          </a:prstGeom>
+          <a:ln w="19050">
+            <a:prstDash val="dash"/>
+          </a:ln>
+        </p:spPr>
+        <p:style>
+          <a:lnRef idx="1">
+            <a:schemeClr val="dk1"/>
+          </a:lnRef>
+          <a:fillRef idx="0">
+            <a:schemeClr val="dk1"/>
+          </a:fillRef>
+          <a:effectRef idx="0">
+            <a:schemeClr val="dk1"/>
+          </a:effectRef>
+          <a:fontRef idx="minor">
+            <a:schemeClr val="tx1"/>
+          </a:fontRef>
+        </p:style>
+      </p:cxnSp>
+      <p:cxnSp>
+        <p:nvCxnSpPr>
+          <p:cNvPr id="60" name="Straight Connector 59">
+            <a:extLst>
+              <a:ext uri="{FF2B5EF4-FFF2-40B4-BE49-F238E27FC236}">
+                <a16:creationId xmlns:a16="http://schemas.microsoft.com/office/drawing/2014/main" id="{1458DC61-1209-7246-604C-DD21667C619E}"/>
+              </a:ext>
+            </a:extLst>
+          </p:cNvPr>
+          <p:cNvCxnSpPr>
+            <a:cxnSpLocks/>
+          </p:cNvCxnSpPr>
+          <p:nvPr/>
+        </p:nvCxnSpPr>
+        <p:spPr>
+          <a:xfrm>
+            <a:off x="5753002" y="2667304"/>
+            <a:ext cx="0" cy="1731957"/>
+          </a:xfrm>
+          <a:prstGeom prst="line">
+            <a:avLst/>
+          </a:prstGeom>
+          <a:ln w="19050">
+            <a:prstDash val="dash"/>
+          </a:ln>
+        </p:spPr>
+        <p:style>
+          <a:lnRef idx="1">
+            <a:schemeClr val="dk1"/>
+          </a:lnRef>
+          <a:fillRef idx="0">
+            <a:schemeClr val="dk1"/>
+          </a:fillRef>
+          <a:effectRef idx="0">
+            <a:schemeClr val="dk1"/>
+          </a:effectRef>
+          <a:fontRef idx="minor">
+            <a:schemeClr val="tx1"/>
+          </a:fontRef>
+        </p:style>
+      </p:cxnSp>
+      <p:cxnSp>
+        <p:nvCxnSpPr>
+          <p:cNvPr id="62" name="Straight Connector 61">
+            <a:extLst>
+              <a:ext uri="{FF2B5EF4-FFF2-40B4-BE49-F238E27FC236}">
+                <a16:creationId xmlns:a16="http://schemas.microsoft.com/office/drawing/2014/main" id="{5CF8C29A-1E86-92EF-BCA2-04550CFCD104}"/>
+              </a:ext>
+            </a:extLst>
+          </p:cNvPr>
+          <p:cNvCxnSpPr>
+            <a:cxnSpLocks/>
+          </p:cNvCxnSpPr>
+          <p:nvPr/>
+        </p:nvCxnSpPr>
+        <p:spPr>
+          <a:xfrm>
+            <a:off x="6693877" y="2667304"/>
+            <a:ext cx="0" cy="1876751"/>
+          </a:xfrm>
+          <a:prstGeom prst="line">
+            <a:avLst/>
+          </a:prstGeom>
+          <a:ln w="19050">
+            <a:prstDash val="dash"/>
+          </a:ln>
+        </p:spPr>
+        <p:style>
+          <a:lnRef idx="1">
+            <a:schemeClr val="dk1"/>
+          </a:lnRef>
+          <a:fillRef idx="0">
+            <a:schemeClr val="dk1"/>
+          </a:fillRef>
+          <a:effectRef idx="0">
+            <a:schemeClr val="dk1"/>
+          </a:effectRef>
+          <a:fontRef idx="minor">
+            <a:schemeClr val="tx1"/>
+          </a:fontRef>
+        </p:style>
+      </p:cxnSp>
+      <p:cxnSp>
+        <p:nvCxnSpPr>
+          <p:cNvPr id="64" name="Straight Connector 63">
+            <a:extLst>
+              <a:ext uri="{FF2B5EF4-FFF2-40B4-BE49-F238E27FC236}">
+                <a16:creationId xmlns:a16="http://schemas.microsoft.com/office/drawing/2014/main" id="{1B152463-438D-267D-D502-2D341F357A49}"/>
+              </a:ext>
+            </a:extLst>
+          </p:cNvPr>
+          <p:cNvCxnSpPr>
+            <a:cxnSpLocks/>
+          </p:cNvCxnSpPr>
+          <p:nvPr/>
+        </p:nvCxnSpPr>
+        <p:spPr>
+          <a:xfrm>
+            <a:off x="7670242" y="2558137"/>
+            <a:ext cx="0" cy="1854850"/>
+          </a:xfrm>
+          <a:prstGeom prst="line">
+            <a:avLst/>
+          </a:prstGeom>
+          <a:ln w="19050">
+            <a:prstDash val="dash"/>
+          </a:ln>
+        </p:spPr>
+        <p:style>
+          <a:lnRef idx="1">
+            <a:schemeClr val="dk1"/>
+          </a:lnRef>
+          <a:fillRef idx="0">
+            <a:schemeClr val="dk1"/>
+          </a:fillRef>
+          <a:effectRef idx="0">
+            <a:schemeClr val="dk1"/>
+          </a:effectRef>
+          <a:fontRef idx="minor">
+            <a:schemeClr val="tx1"/>
+          </a:fontRef>
+        </p:style>
+      </p:cxnSp>
+      <p:cxnSp>
+        <p:nvCxnSpPr>
+          <p:cNvPr id="66" name="Straight Connector 65">
+            <a:extLst>
+              <a:ext uri="{FF2B5EF4-FFF2-40B4-BE49-F238E27FC236}">
+                <a16:creationId xmlns:a16="http://schemas.microsoft.com/office/drawing/2014/main" id="{118BF93F-3BC5-451F-5C51-D5B63ADCB37D}"/>
+              </a:ext>
+            </a:extLst>
+          </p:cNvPr>
+          <p:cNvCxnSpPr>
+            <a:cxnSpLocks/>
+          </p:cNvCxnSpPr>
+          <p:nvPr/>
+        </p:nvCxnSpPr>
+        <p:spPr>
+          <a:xfrm>
+            <a:off x="8524351" y="2704170"/>
+            <a:ext cx="0" cy="1762214"/>
+          </a:xfrm>
+          <a:prstGeom prst="line">
+            <a:avLst/>
+          </a:prstGeom>
+          <a:ln w="19050">
+            <a:prstDash val="dash"/>
+          </a:ln>
+        </p:spPr>
+        <p:style>
+          <a:lnRef idx="1">
+            <a:schemeClr val="dk1"/>
+          </a:lnRef>
+          <a:fillRef idx="0">
+            <a:schemeClr val="dk1"/>
+          </a:fillRef>
+          <a:effectRef idx="0">
+            <a:schemeClr val="dk1"/>
+          </a:effectRef>
+          <a:fontRef idx="minor">
+            <a:schemeClr val="tx1"/>
+          </a:fontRef>
+        </p:style>
+      </p:cxnSp>
+      <p:sp>
+        <p:nvSpPr>
+          <p:cNvPr id="69" name="TextBox 68">
+            <a:extLst>
+              <a:ext uri="{FF2B5EF4-FFF2-40B4-BE49-F238E27FC236}">
+                <a16:creationId xmlns:a16="http://schemas.microsoft.com/office/drawing/2014/main" id="{F3B11D96-DF51-E86B-6197-4DF87E48F856}"/>
+              </a:ext>
+            </a:extLst>
+          </p:cNvPr>
+          <p:cNvSpPr txBox="1"/>
+          <p:nvPr/>
+        </p:nvSpPr>
+        <p:spPr>
+          <a:xfrm>
+            <a:off x="3168784" y="1421302"/>
+            <a:ext cx="1056319" cy="923330"/>
+          </a:xfrm>
+          <a:prstGeom prst="rect">
+            <a:avLst/>
+          </a:prstGeom>
+          <a:noFill/>
+        </p:spPr>
+        <p:txBody>
+          <a:bodyPr wrap="square">
+            <a:spAutoFit/>
+          </a:bodyPr>
+          <a:lstStyle/>
+          <a:p>
+            <a:pPr>
+              <a:buNone/>
+            </a:pPr>
+            <a:r>
+              <a:rPr lang="en-IN" sz="900" b="1" dirty="0">
+                <a:latin typeface="Arial Black" panose="020B0A04020102020204" pitchFamily="34" charset="0"/>
+              </a:rPr>
+              <a:t>1)RAINFALL NOWCAST</a:t>
+            </a:r>
+          </a:p>
+          <a:p>
+            <a:pPr>
+              <a:buNone/>
+            </a:pPr>
+            <a:r>
+              <a:rPr lang="en-IN" sz="900" b="1" dirty="0"/>
+              <a:t>High-resolution spatial &amp; temporal rainfall input.</a:t>
+            </a:r>
+            <a:endParaRPr lang="en-IN" sz="900" dirty="0"/>
+          </a:p>
+        </p:txBody>
+      </p:sp>
+      <p:sp>
+        <p:nvSpPr>
+          <p:cNvPr id="71" name="TextBox 70">
+            <a:extLst>
+              <a:ext uri="{FF2B5EF4-FFF2-40B4-BE49-F238E27FC236}">
+                <a16:creationId xmlns:a16="http://schemas.microsoft.com/office/drawing/2014/main" id="{515F8AB5-C6F9-07B6-2C57-D6058DB47F6E}"/>
+              </a:ext>
+            </a:extLst>
+          </p:cNvPr>
+          <p:cNvSpPr txBox="1"/>
+          <p:nvPr/>
+        </p:nvSpPr>
+        <p:spPr>
+          <a:xfrm>
+            <a:off x="4277062" y="1407111"/>
+            <a:ext cx="885139" cy="1061829"/>
+          </a:xfrm>
+          <a:prstGeom prst="rect">
+            <a:avLst/>
+          </a:prstGeom>
+          <a:noFill/>
+        </p:spPr>
+        <p:txBody>
+          <a:bodyPr wrap="square">
+            <a:spAutoFit/>
+          </a:bodyPr>
+          <a:lstStyle/>
+          <a:p>
+            <a:pPr>
+              <a:buNone/>
+            </a:pPr>
+            <a:r>
+              <a:rPr lang="en-IN" sz="900" b="1" dirty="0">
+                <a:latin typeface="Arial Black" panose="020B0A04020102020204" pitchFamily="34" charset="0"/>
+              </a:rPr>
+              <a:t>2)TERRAIN &amp; SURFACE</a:t>
+            </a:r>
+          </a:p>
+          <a:p>
+            <a:pPr>
+              <a:buNone/>
+            </a:pPr>
+            <a:r>
+              <a:rPr lang="en-IN" sz="900" b="1" dirty="0"/>
+              <a:t>DEM, land use &amp; roughness define flow paths.</a:t>
+            </a:r>
+            <a:endParaRPr lang="en-IN" sz="900" dirty="0"/>
+          </a:p>
+        </p:txBody>
+      </p:sp>
+      <p:sp>
+        <p:nvSpPr>
+          <p:cNvPr id="73" name="TextBox 72">
+            <a:extLst>
+              <a:ext uri="{FF2B5EF4-FFF2-40B4-BE49-F238E27FC236}">
+                <a16:creationId xmlns:a16="http://schemas.microsoft.com/office/drawing/2014/main" id="{4DA632A3-D9AF-39E3-FA11-D8A6B79E50B2}"/>
+              </a:ext>
+            </a:extLst>
+          </p:cNvPr>
+          <p:cNvSpPr txBox="1"/>
+          <p:nvPr/>
+        </p:nvSpPr>
+        <p:spPr>
+          <a:xfrm>
+            <a:off x="5394124" y="1407111"/>
+            <a:ext cx="802111" cy="1200329"/>
+          </a:xfrm>
+          <a:prstGeom prst="rect">
+            <a:avLst/>
+          </a:prstGeom>
+          <a:noFill/>
+        </p:spPr>
+        <p:txBody>
+          <a:bodyPr wrap="square">
+            <a:spAutoFit/>
+          </a:bodyPr>
+          <a:lstStyle/>
+          <a:p>
+            <a:pPr>
+              <a:buNone/>
+            </a:pPr>
+            <a:r>
+              <a:rPr lang="en-IN" sz="900" b="1" dirty="0">
+                <a:latin typeface="Arial Black" panose="020B0A04020102020204" pitchFamily="34" charset="0"/>
+              </a:rPr>
+              <a:t>3)2D SURFACE RUNOFF</a:t>
+            </a:r>
+          </a:p>
+          <a:p>
+            <a:pPr>
+              <a:buNone/>
+            </a:pPr>
+            <a:r>
+              <a:rPr lang="en-IN" sz="900" b="1" dirty="0"/>
+              <a:t>Runoff generation and overland flow routing.</a:t>
+            </a:r>
+            <a:endParaRPr lang="en-IN" sz="900" dirty="0"/>
+          </a:p>
+        </p:txBody>
+      </p:sp>
+      <p:sp>
+        <p:nvSpPr>
+          <p:cNvPr id="75" name="TextBox 74">
+            <a:extLst>
+              <a:ext uri="{FF2B5EF4-FFF2-40B4-BE49-F238E27FC236}">
+                <a16:creationId xmlns:a16="http://schemas.microsoft.com/office/drawing/2014/main" id="{B1407967-1345-A3BD-23C4-95E1BCF3E9EF}"/>
+              </a:ext>
+            </a:extLst>
+          </p:cNvPr>
+          <p:cNvSpPr txBox="1"/>
+          <p:nvPr/>
+        </p:nvSpPr>
+        <p:spPr>
+          <a:xfrm>
+            <a:off x="6306908" y="1416151"/>
+            <a:ext cx="935319" cy="1061829"/>
+          </a:xfrm>
+          <a:prstGeom prst="rect">
+            <a:avLst/>
+          </a:prstGeom>
+          <a:noFill/>
+        </p:spPr>
+        <p:txBody>
+          <a:bodyPr wrap="square">
+            <a:spAutoFit/>
+          </a:bodyPr>
+          <a:lstStyle/>
+          <a:p>
+            <a:pPr>
+              <a:buNone/>
+            </a:pPr>
+            <a:r>
+              <a:rPr lang="en-IN" sz="900" b="1" dirty="0">
+                <a:latin typeface="Arial Black" panose="020B0A04020102020204" pitchFamily="34" charset="0"/>
+              </a:rPr>
+              <a:t>4)1D DRAINAGE NETWORK</a:t>
+            </a:r>
+          </a:p>
+          <a:p>
+            <a:pPr>
+              <a:buNone/>
+            </a:pPr>
+            <a:r>
+              <a:rPr lang="en-IN" sz="900" b="1" dirty="0"/>
+              <a:t>Nodes, inlets &amp; pipes with capacity and connectivity.</a:t>
+            </a:r>
+            <a:endParaRPr lang="en-IN" sz="900" dirty="0"/>
+          </a:p>
+        </p:txBody>
+      </p:sp>
+      <p:sp>
+        <p:nvSpPr>
+          <p:cNvPr id="79" name="TextBox 78">
+            <a:extLst>
+              <a:ext uri="{FF2B5EF4-FFF2-40B4-BE49-F238E27FC236}">
+                <a16:creationId xmlns:a16="http://schemas.microsoft.com/office/drawing/2014/main" id="{DD29346B-9B9D-784D-47F8-45C8C6D8CED4}"/>
+              </a:ext>
+            </a:extLst>
+          </p:cNvPr>
+          <p:cNvSpPr txBox="1"/>
+          <p:nvPr/>
+        </p:nvSpPr>
+        <p:spPr>
+          <a:xfrm>
+            <a:off x="7188730" y="1415705"/>
+            <a:ext cx="951252" cy="1200329"/>
+          </a:xfrm>
+          <a:prstGeom prst="rect">
+            <a:avLst/>
+          </a:prstGeom>
+          <a:noFill/>
+        </p:spPr>
+        <p:txBody>
+          <a:bodyPr wrap="square">
+            <a:spAutoFit/>
+          </a:bodyPr>
+          <a:lstStyle/>
+          <a:p>
+            <a:pPr>
+              <a:buNone/>
+            </a:pPr>
+            <a:r>
+              <a:rPr lang="en-IN" sz="900" b="1" dirty="0">
+                <a:latin typeface="Arial Black" panose="020B0A04020102020204" pitchFamily="34" charset="0"/>
+              </a:rPr>
+              <a:t>5)HYDRAULIC RESPONSE</a:t>
+            </a:r>
+          </a:p>
+          <a:p>
+            <a:pPr>
+              <a:buNone/>
+            </a:pPr>
+            <a:r>
+              <a:rPr lang="en-IN" sz="900" b="1" dirty="0"/>
+              <a:t>Capacity limitation → surcharge, backflow, overflow.</a:t>
+            </a:r>
+            <a:endParaRPr lang="en-IN" sz="900" dirty="0"/>
+          </a:p>
+        </p:txBody>
+      </p:sp>
+      <p:sp>
+        <p:nvSpPr>
+          <p:cNvPr id="81" name="TextBox 80">
+            <a:extLst>
+              <a:ext uri="{FF2B5EF4-FFF2-40B4-BE49-F238E27FC236}">
+                <a16:creationId xmlns:a16="http://schemas.microsoft.com/office/drawing/2014/main" id="{2A62045F-A800-D70A-286A-77FF0C929673}"/>
+              </a:ext>
+            </a:extLst>
+          </p:cNvPr>
+          <p:cNvSpPr txBox="1"/>
+          <p:nvPr/>
+        </p:nvSpPr>
+        <p:spPr>
+          <a:xfrm>
+            <a:off x="8104751" y="1647342"/>
+            <a:ext cx="1062058" cy="923330"/>
+          </a:xfrm>
+          <a:prstGeom prst="rect">
+            <a:avLst/>
+          </a:prstGeom>
+          <a:noFill/>
+        </p:spPr>
+        <p:txBody>
+          <a:bodyPr wrap="square">
+            <a:spAutoFit/>
+          </a:bodyPr>
+          <a:lstStyle/>
+          <a:p>
+            <a:pPr>
+              <a:buNone/>
+            </a:pPr>
+            <a:r>
+              <a:rPr lang="en-IN" sz="900" b="1" dirty="0">
+                <a:latin typeface="Arial Black" panose="020B0A04020102020204" pitchFamily="34" charset="0"/>
+              </a:rPr>
+              <a:t>6)STREET-LEVEL INUNDATION</a:t>
+            </a:r>
+          </a:p>
+          <a:p>
+            <a:pPr>
+              <a:buNone/>
+            </a:pPr>
+            <a:r>
+              <a:rPr lang="en-IN" sz="900" b="1" dirty="0"/>
+              <a:t>Water depth and flood extent on streets.</a:t>
+            </a:r>
+            <a:endParaRPr lang="en-IN" sz="900" dirty="0"/>
+          </a:p>
+        </p:txBody>
+      </p:sp>
+      <p:cxnSp>
+        <p:nvCxnSpPr>
+          <p:cNvPr id="83" name="Straight Connector 82">
+            <a:extLst>
+              <a:ext uri="{FF2B5EF4-FFF2-40B4-BE49-F238E27FC236}">
+                <a16:creationId xmlns:a16="http://schemas.microsoft.com/office/drawing/2014/main" id="{6E6EC002-A6AD-FFFB-15FB-D0CAB0B4A85A}"/>
+              </a:ext>
+            </a:extLst>
+          </p:cNvPr>
+          <p:cNvCxnSpPr>
+            <a:cxnSpLocks/>
+          </p:cNvCxnSpPr>
+          <p:nvPr/>
+        </p:nvCxnSpPr>
+        <p:spPr>
+          <a:xfrm>
+            <a:off x="4088449" y="1531591"/>
+            <a:ext cx="210267" cy="0"/>
+          </a:xfrm>
+          <a:prstGeom prst="line">
+            <a:avLst/>
+          </a:prstGeom>
+          <a:ln w="19050">
+            <a:prstDash val="dash"/>
+          </a:ln>
+        </p:spPr>
+        <p:style>
+          <a:lnRef idx="1">
+            <a:schemeClr val="dk1"/>
+          </a:lnRef>
+          <a:fillRef idx="0">
+            <a:schemeClr val="dk1"/>
+          </a:fillRef>
+          <a:effectRef idx="0">
+            <a:schemeClr val="dk1"/>
+          </a:effectRef>
+          <a:fontRef idx="minor">
+            <a:schemeClr val="tx1"/>
+          </a:fontRef>
+        </p:style>
+      </p:cxnSp>
+      <p:cxnSp>
+        <p:nvCxnSpPr>
+          <p:cNvPr id="85" name="Straight Connector 84">
+            <a:extLst>
+              <a:ext uri="{FF2B5EF4-FFF2-40B4-BE49-F238E27FC236}">
+                <a16:creationId xmlns:a16="http://schemas.microsoft.com/office/drawing/2014/main" id="{6E1BDB4C-03D1-E601-A3FF-3A417ABDC008}"/>
+              </a:ext>
+            </a:extLst>
+          </p:cNvPr>
+          <p:cNvCxnSpPr>
+            <a:cxnSpLocks/>
+          </p:cNvCxnSpPr>
+          <p:nvPr/>
+        </p:nvCxnSpPr>
+        <p:spPr>
+          <a:xfrm flipV="1">
+            <a:off x="5109379" y="1531591"/>
+            <a:ext cx="390705" cy="5739"/>
+          </a:xfrm>
+          <a:prstGeom prst="line">
+            <a:avLst/>
+          </a:prstGeom>
+          <a:ln w="19050">
+            <a:prstDash val="dash"/>
+          </a:ln>
+        </p:spPr>
+        <p:style>
+          <a:lnRef idx="1">
+            <a:schemeClr val="dk1"/>
+          </a:lnRef>
+          <a:fillRef idx="0">
+            <a:schemeClr val="dk1"/>
+          </a:fillRef>
+          <a:effectRef idx="0">
+            <a:schemeClr val="dk1"/>
+          </a:effectRef>
+          <a:fontRef idx="minor">
+            <a:schemeClr val="tx1"/>
+          </a:fontRef>
+        </p:style>
+      </p:cxnSp>
+      <p:cxnSp>
+        <p:nvCxnSpPr>
+          <p:cNvPr id="87" name="Straight Connector 86">
+            <a:extLst>
+              <a:ext uri="{FF2B5EF4-FFF2-40B4-BE49-F238E27FC236}">
+                <a16:creationId xmlns:a16="http://schemas.microsoft.com/office/drawing/2014/main" id="{1C376E03-0ED2-2DD8-F2E2-150EB0091204}"/>
+              </a:ext>
+            </a:extLst>
+          </p:cNvPr>
+          <p:cNvCxnSpPr>
+            <a:cxnSpLocks/>
+          </p:cNvCxnSpPr>
+          <p:nvPr/>
+        </p:nvCxnSpPr>
+        <p:spPr>
+          <a:xfrm>
+            <a:off x="5839126" y="1531591"/>
+            <a:ext cx="513748" cy="0"/>
+          </a:xfrm>
+          <a:prstGeom prst="line">
+            <a:avLst/>
+          </a:prstGeom>
+          <a:ln w="19050">
+            <a:prstDash val="dash"/>
+          </a:ln>
+        </p:spPr>
+        <p:style>
+          <a:lnRef idx="1">
+            <a:schemeClr val="dk1"/>
+          </a:lnRef>
+          <a:fillRef idx="0">
+            <a:schemeClr val="dk1"/>
+          </a:fillRef>
+          <a:effectRef idx="0">
+            <a:schemeClr val="dk1"/>
+          </a:effectRef>
+          <a:fontRef idx="minor">
+            <a:schemeClr val="tx1"/>
+          </a:fontRef>
+        </p:style>
+      </p:cxnSp>
+      <p:cxnSp>
+        <p:nvCxnSpPr>
+          <p:cNvPr id="89" name="Straight Connector 88">
+            <a:extLst>
+              <a:ext uri="{FF2B5EF4-FFF2-40B4-BE49-F238E27FC236}">
+                <a16:creationId xmlns:a16="http://schemas.microsoft.com/office/drawing/2014/main" id="{6F32DA4A-CC11-8F43-8B8F-790742F330D2}"/>
+              </a:ext>
+            </a:extLst>
+          </p:cNvPr>
+          <p:cNvCxnSpPr>
+            <a:cxnSpLocks/>
+          </p:cNvCxnSpPr>
+          <p:nvPr/>
+        </p:nvCxnSpPr>
+        <p:spPr>
+          <a:xfrm>
+            <a:off x="6747369" y="1531523"/>
+            <a:ext cx="494858" cy="0"/>
+          </a:xfrm>
+          <a:prstGeom prst="line">
+            <a:avLst/>
+          </a:prstGeom>
+          <a:ln w="19050">
+            <a:prstDash val="dash"/>
+          </a:ln>
+        </p:spPr>
+        <p:style>
+          <a:lnRef idx="1">
+            <a:schemeClr val="dk1"/>
+          </a:lnRef>
+          <a:fillRef idx="0">
+            <a:schemeClr val="dk1"/>
+          </a:fillRef>
+          <a:effectRef idx="0">
+            <a:schemeClr val="dk1"/>
+          </a:effectRef>
+          <a:fontRef idx="minor">
+            <a:schemeClr val="tx1"/>
+          </a:fontRef>
+        </p:style>
+      </p:cxnSp>
+      <p:cxnSp>
+        <p:nvCxnSpPr>
+          <p:cNvPr id="91" name="Straight Connector 90">
+            <a:extLst>
+              <a:ext uri="{FF2B5EF4-FFF2-40B4-BE49-F238E27FC236}">
+                <a16:creationId xmlns:a16="http://schemas.microsoft.com/office/drawing/2014/main" id="{A1CD7D5B-F74B-23A4-29EA-31E781EC4F99}"/>
+              </a:ext>
+            </a:extLst>
+          </p:cNvPr>
+          <p:cNvCxnSpPr>
+            <a:cxnSpLocks/>
+          </p:cNvCxnSpPr>
+          <p:nvPr/>
+        </p:nvCxnSpPr>
+        <p:spPr>
+          <a:xfrm>
+            <a:off x="8030022" y="1531523"/>
+            <a:ext cx="400545" cy="0"/>
+          </a:xfrm>
+          <a:prstGeom prst="line">
+            <a:avLst/>
+          </a:prstGeom>
+          <a:ln w="19050">
+            <a:prstDash val="dash"/>
+          </a:ln>
+        </p:spPr>
+        <p:style>
+          <a:lnRef idx="1">
+            <a:schemeClr val="dk1"/>
+          </a:lnRef>
+          <a:fillRef idx="0">
+            <a:schemeClr val="dk1"/>
+          </a:fillRef>
+          <a:effectRef idx="0">
+            <a:schemeClr val="dk1"/>
+          </a:effectRef>
+          <a:fontRef idx="minor">
+            <a:schemeClr val="tx1"/>
+          </a:fontRef>
+        </p:style>
+      </p:cxnSp>
+      <p:cxnSp>
+        <p:nvCxnSpPr>
+          <p:cNvPr id="93" name="Straight Connector 92">
+            <a:extLst>
+              <a:ext uri="{FF2B5EF4-FFF2-40B4-BE49-F238E27FC236}">
+                <a16:creationId xmlns:a16="http://schemas.microsoft.com/office/drawing/2014/main" id="{F067E8FF-19DF-18A0-856E-F1272CA5A5EA}"/>
+              </a:ext>
+            </a:extLst>
+          </p:cNvPr>
+          <p:cNvCxnSpPr>
+            <a:cxnSpLocks/>
+          </p:cNvCxnSpPr>
+          <p:nvPr/>
+        </p:nvCxnSpPr>
+        <p:spPr>
+          <a:xfrm>
+            <a:off x="8430567" y="1531523"/>
+            <a:ext cx="0" cy="115819"/>
+          </a:xfrm>
+          <a:prstGeom prst="line">
+            <a:avLst/>
+          </a:prstGeom>
+          <a:ln w="19050">
+            <a:prstDash val="dash"/>
+          </a:ln>
+        </p:spPr>
+        <p:style>
+          <a:lnRef idx="1">
+            <a:schemeClr val="dk1"/>
+          </a:lnRef>
+          <a:fillRef idx="0">
+            <a:schemeClr val="dk1"/>
+          </a:fillRef>
+          <a:effectRef idx="0">
+            <a:schemeClr val="dk1"/>
+          </a:effectRef>
+          <a:fontRef idx="minor">
+            <a:schemeClr val="tx1"/>
+          </a:fontRef>
+        </p:style>
+      </p:cxnSp>
+      <p:sp>
+        <p:nvSpPr>
+          <p:cNvPr id="95" name="Rectangle 94">
+            <a:extLst>
+              <a:ext uri="{FF2B5EF4-FFF2-40B4-BE49-F238E27FC236}">
+                <a16:creationId xmlns:a16="http://schemas.microsoft.com/office/drawing/2014/main" id="{B7CFA308-C566-221A-75FE-28300CB131B9}"/>
+              </a:ext>
+            </a:extLst>
+          </p:cNvPr>
+          <p:cNvSpPr/>
+          <p:nvPr/>
+        </p:nvSpPr>
+        <p:spPr>
+          <a:xfrm>
+            <a:off x="694829" y="6208042"/>
+            <a:ext cx="11002812" cy="573700"/>
+          </a:xfrm>
+          <a:prstGeom prst="rect">
+            <a:avLst/>
+          </a:prstGeom>
+        </p:spPr>
+        <p:style>
+          <a:lnRef idx="2">
+            <a:schemeClr val="accent6"/>
+          </a:lnRef>
+          <a:fillRef idx="1">
+            <a:schemeClr val="lt1"/>
+          </a:fillRef>
+          <a:effectRef idx="0">
+            <a:schemeClr val="accent6"/>
+          </a:effectRef>
+          <a:fontRef idx="minor">
+            <a:schemeClr val="dk1"/>
+          </a:fontRef>
+        </p:style>
+        <p:txBody>
+          <a:bodyPr rtlCol="0" anchor="ctr"/>
+          <a:lstStyle/>
+          <a:p>
+            <a:pPr algn="ctr"/>
+            <a:endParaRPr lang="en-IN" sz="1600" b="1" dirty="0"/>
+          </a:p>
+        </p:txBody>
+      </p:sp>
+      <p:sp>
+        <p:nvSpPr>
+          <p:cNvPr id="97" name="TextBox 96">
+            <a:extLst>
+              <a:ext uri="{FF2B5EF4-FFF2-40B4-BE49-F238E27FC236}">
+                <a16:creationId xmlns:a16="http://schemas.microsoft.com/office/drawing/2014/main" id="{A9C44A8D-E3A7-951A-E405-C526DD04056B}"/>
+              </a:ext>
+            </a:extLst>
+          </p:cNvPr>
+          <p:cNvSpPr txBox="1"/>
+          <p:nvPr/>
+        </p:nvSpPr>
+        <p:spPr>
+          <a:xfrm>
+            <a:off x="4390335" y="5956253"/>
+            <a:ext cx="3058722" cy="369332"/>
+          </a:xfrm>
+          <a:prstGeom prst="rect">
+            <a:avLst/>
+          </a:prstGeom>
+          <a:solidFill>
+            <a:schemeClr val="accent5">
+              <a:lumMod val="60000"/>
+              <a:lumOff val="40000"/>
+            </a:schemeClr>
+          </a:solidFill>
+        </p:spPr>
+        <p:txBody>
+          <a:bodyPr wrap="none" rtlCol="0">
+            <a:spAutoFit/>
+          </a:bodyPr>
+          <a:lstStyle/>
+          <a:p>
+            <a:r>
+              <a:rPr lang="en-IN" dirty="0"/>
+              <a:t>FROM PREDICTION TO ACTION</a:t>
+            </a:r>
+          </a:p>
+        </p:txBody>
+      </p:sp>
+      <p:sp>
+        <p:nvSpPr>
+          <p:cNvPr id="99" name="TextBox 98">
+            <a:extLst>
+              <a:ext uri="{FF2B5EF4-FFF2-40B4-BE49-F238E27FC236}">
+                <a16:creationId xmlns:a16="http://schemas.microsoft.com/office/drawing/2014/main" id="{114D3282-9995-AF8D-6C64-6D7D35DE85FB}"/>
+              </a:ext>
+            </a:extLst>
+          </p:cNvPr>
+          <p:cNvSpPr txBox="1"/>
+          <p:nvPr/>
+        </p:nvSpPr>
+        <p:spPr>
+          <a:xfrm>
+            <a:off x="1391843" y="6383030"/>
+            <a:ext cx="2066421" cy="338554"/>
+          </a:xfrm>
+          <a:prstGeom prst="rect">
+            <a:avLst/>
+          </a:prstGeom>
+          <a:noFill/>
+        </p:spPr>
+        <p:txBody>
+          <a:bodyPr wrap="square">
+            <a:spAutoFit/>
+          </a:bodyPr>
+          <a:lstStyle/>
+          <a:p>
+            <a:pPr>
+              <a:buNone/>
+            </a:pPr>
+            <a:r>
+              <a:rPr lang="en-IN" sz="1600" b="1" dirty="0"/>
+              <a:t>PREDICT</a:t>
+            </a:r>
+          </a:p>
+        </p:txBody>
+      </p:sp>
+      <p:sp>
+        <p:nvSpPr>
+          <p:cNvPr id="101" name="TextBox 100">
+            <a:extLst>
+              <a:ext uri="{FF2B5EF4-FFF2-40B4-BE49-F238E27FC236}">
+                <a16:creationId xmlns:a16="http://schemas.microsoft.com/office/drawing/2014/main" id="{0641620F-4510-320A-1980-1BF19ABB4CFE}"/>
+              </a:ext>
+            </a:extLst>
+          </p:cNvPr>
+          <p:cNvSpPr txBox="1"/>
+          <p:nvPr/>
+        </p:nvSpPr>
+        <p:spPr>
+          <a:xfrm>
+            <a:off x="3877861" y="6374570"/>
+            <a:ext cx="1231518" cy="338554"/>
+          </a:xfrm>
+          <a:prstGeom prst="rect">
+            <a:avLst/>
+          </a:prstGeom>
+          <a:noFill/>
+        </p:spPr>
+        <p:txBody>
+          <a:bodyPr wrap="square">
+            <a:spAutoFit/>
+          </a:bodyPr>
+          <a:lstStyle/>
+          <a:p>
+            <a:r>
+              <a:rPr lang="en-IN" sz="1600" b="1" dirty="0"/>
+              <a:t>PRIORITISE</a:t>
+            </a:r>
+          </a:p>
+        </p:txBody>
+      </p:sp>
+      <p:sp>
+        <p:nvSpPr>
+          <p:cNvPr id="103" name="TextBox 102">
+            <a:extLst>
+              <a:ext uri="{FF2B5EF4-FFF2-40B4-BE49-F238E27FC236}">
+                <a16:creationId xmlns:a16="http://schemas.microsoft.com/office/drawing/2014/main" id="{4C9A4033-1203-1934-E88B-0A8C13A019D5}"/>
+              </a:ext>
+            </a:extLst>
+          </p:cNvPr>
+          <p:cNvSpPr txBox="1"/>
+          <p:nvPr/>
+        </p:nvSpPr>
+        <p:spPr>
+          <a:xfrm>
+            <a:off x="7302158" y="6335550"/>
+            <a:ext cx="1035224" cy="338554"/>
+          </a:xfrm>
+          <a:prstGeom prst="rect">
+            <a:avLst/>
+          </a:prstGeom>
+          <a:noFill/>
+        </p:spPr>
+        <p:txBody>
+          <a:bodyPr wrap="square">
+            <a:spAutoFit/>
+          </a:bodyPr>
+          <a:lstStyle/>
+          <a:p>
+            <a:r>
+              <a:rPr lang="en-IN" sz="1600" b="1" dirty="0"/>
+              <a:t>ALERT</a:t>
+            </a:r>
+          </a:p>
+        </p:txBody>
+      </p:sp>
+      <p:sp>
+        <p:nvSpPr>
+          <p:cNvPr id="105" name="TextBox 104">
+            <a:extLst>
+              <a:ext uri="{FF2B5EF4-FFF2-40B4-BE49-F238E27FC236}">
+                <a16:creationId xmlns:a16="http://schemas.microsoft.com/office/drawing/2014/main" id="{0606A80D-C684-E983-A691-C553C62D5496}"/>
+              </a:ext>
+            </a:extLst>
+          </p:cNvPr>
+          <p:cNvSpPr txBox="1"/>
+          <p:nvPr/>
+        </p:nvSpPr>
+        <p:spPr>
+          <a:xfrm>
+            <a:off x="10284898" y="6335550"/>
+            <a:ext cx="8897814" cy="338554"/>
+          </a:xfrm>
+          <a:prstGeom prst="rect">
+            <a:avLst/>
+          </a:prstGeom>
+          <a:noFill/>
+        </p:spPr>
+        <p:txBody>
+          <a:bodyPr wrap="square">
+            <a:spAutoFit/>
+          </a:bodyPr>
+          <a:lstStyle/>
+          <a:p>
+            <a:r>
+              <a:rPr lang="en-IN" sz="1600" b="1" dirty="0"/>
+              <a:t>ACT</a:t>
+            </a:r>
+          </a:p>
+        </p:txBody>
+      </p:sp>
+      <p:pic>
+        <p:nvPicPr>
+          <p:cNvPr id="106" name="Picture 105">
+            <a:extLst>
+              <a:ext uri="{FF2B5EF4-FFF2-40B4-BE49-F238E27FC236}">
+                <a16:creationId xmlns:a16="http://schemas.microsoft.com/office/drawing/2014/main" id="{B89F2B2D-67B0-6D26-0369-73F71A81D8C4}"/>
+              </a:ext>
+            </a:extLst>
+          </p:cNvPr>
+          <p:cNvPicPr>
+            <a:picLocks noChangeAspect="1"/>
+          </p:cNvPicPr>
+          <p:nvPr/>
+        </p:nvPicPr>
+        <p:blipFill>
+          <a:blip r:embed="rId12"/>
+          <a:stretch>
+            <a:fillRect/>
+          </a:stretch>
+        </p:blipFill>
+        <p:spPr>
+          <a:xfrm>
+            <a:off x="826637" y="6240958"/>
+            <a:ext cx="623469" cy="546140"/>
+          </a:xfrm>
+          <a:prstGeom prst="rect">
+            <a:avLst/>
+          </a:prstGeom>
+        </p:spPr>
+      </p:pic>
+      <p:pic>
+        <p:nvPicPr>
+          <p:cNvPr id="107" name="Picture 106">
+            <a:extLst>
+              <a:ext uri="{FF2B5EF4-FFF2-40B4-BE49-F238E27FC236}">
+                <a16:creationId xmlns:a16="http://schemas.microsoft.com/office/drawing/2014/main" id="{5AA8D895-4EA3-D1AD-6D42-25727E1EC51E}"/>
+              </a:ext>
+            </a:extLst>
+          </p:cNvPr>
+          <p:cNvPicPr>
+            <a:picLocks noChangeAspect="1"/>
+          </p:cNvPicPr>
+          <p:nvPr/>
+        </p:nvPicPr>
+        <p:blipFill>
+          <a:blip r:embed="rId13"/>
+          <a:stretch>
+            <a:fillRect/>
+          </a:stretch>
+        </p:blipFill>
+        <p:spPr>
+          <a:xfrm>
+            <a:off x="3316975" y="6192157"/>
+            <a:ext cx="771474" cy="675788"/>
+          </a:xfrm>
+          <a:prstGeom prst="rect">
+            <a:avLst/>
+          </a:prstGeom>
+        </p:spPr>
+      </p:pic>
+      <p:pic>
+        <p:nvPicPr>
+          <p:cNvPr id="108" name="Picture 107">
+            <a:extLst>
+              <a:ext uri="{FF2B5EF4-FFF2-40B4-BE49-F238E27FC236}">
+                <a16:creationId xmlns:a16="http://schemas.microsoft.com/office/drawing/2014/main" id="{2BD6BCDD-7C47-8B57-D3A8-BC50787E222E}"/>
+              </a:ext>
+            </a:extLst>
+          </p:cNvPr>
+          <p:cNvPicPr>
+            <a:picLocks noChangeAspect="1"/>
+          </p:cNvPicPr>
+          <p:nvPr/>
+        </p:nvPicPr>
+        <p:blipFill>
+          <a:blip r:embed="rId14"/>
+          <a:stretch>
+            <a:fillRect/>
+          </a:stretch>
+        </p:blipFill>
+        <p:spPr>
+          <a:xfrm>
+            <a:off x="6671662" y="6252408"/>
+            <a:ext cx="741956" cy="649931"/>
+          </a:xfrm>
+          <a:prstGeom prst="rect">
+            <a:avLst/>
+          </a:prstGeom>
+        </p:spPr>
+      </p:pic>
+      <p:pic>
+        <p:nvPicPr>
+          <p:cNvPr id="109" name="Picture 108">
+            <a:extLst>
+              <a:ext uri="{FF2B5EF4-FFF2-40B4-BE49-F238E27FC236}">
+                <a16:creationId xmlns:a16="http://schemas.microsoft.com/office/drawing/2014/main" id="{B97BC1E4-36AC-B65A-91D9-6DE5A6ABAE07}"/>
+              </a:ext>
+            </a:extLst>
+          </p:cNvPr>
+          <p:cNvPicPr>
+            <a:picLocks noChangeAspect="1"/>
+          </p:cNvPicPr>
+          <p:nvPr/>
+        </p:nvPicPr>
+        <p:blipFill>
+          <a:blip r:embed="rId15"/>
+          <a:stretch>
+            <a:fillRect/>
+          </a:stretch>
+        </p:blipFill>
+        <p:spPr>
+          <a:xfrm>
+            <a:off x="9532444" y="6158129"/>
+            <a:ext cx="791575" cy="693395"/>
+          </a:xfrm>
+          <a:prstGeom prst="rect">
+            <a:avLst/>
+          </a:prstGeom>
+        </p:spPr>
+      </p:pic>
+      <p:pic>
+        <p:nvPicPr>
+          <p:cNvPr id="110" name="Picture 109">
+            <a:extLst>
+              <a:ext uri="{FF2B5EF4-FFF2-40B4-BE49-F238E27FC236}">
+                <a16:creationId xmlns:a16="http://schemas.microsoft.com/office/drawing/2014/main" id="{8F42111E-DC9B-6092-C711-CE601559650E}"/>
+              </a:ext>
+            </a:extLst>
+          </p:cNvPr>
+          <p:cNvPicPr>
+            <a:picLocks noChangeAspect="1"/>
+          </p:cNvPicPr>
+          <p:nvPr/>
+        </p:nvPicPr>
+        <p:blipFill>
+          <a:blip r:embed="rId16"/>
+          <a:stretch>
+            <a:fillRect/>
+          </a:stretch>
+        </p:blipFill>
+        <p:spPr>
+          <a:xfrm>
+            <a:off x="8905866" y="4101775"/>
+            <a:ext cx="945188" cy="827955"/>
+          </a:xfrm>
+          <a:prstGeom prst="rect">
+            <a:avLst/>
+          </a:prstGeom>
+        </p:spPr>
+      </p:pic>
+      <p:cxnSp>
+        <p:nvCxnSpPr>
+          <p:cNvPr id="112" name="Straight Arrow Connector 111">
+            <a:extLst>
+              <a:ext uri="{FF2B5EF4-FFF2-40B4-BE49-F238E27FC236}">
+                <a16:creationId xmlns:a16="http://schemas.microsoft.com/office/drawing/2014/main" id="{CF1ADBD1-4A8E-07FB-51AA-7D1DEF82183C}"/>
+              </a:ext>
+            </a:extLst>
+          </p:cNvPr>
+          <p:cNvCxnSpPr/>
+          <p:nvPr/>
+        </p:nvCxnSpPr>
+        <p:spPr>
+          <a:xfrm flipV="1">
+            <a:off x="2270927" y="6545915"/>
+            <a:ext cx="1046048" cy="9934"/>
+          </a:xfrm>
+          <a:prstGeom prst="straightConnector1">
+            <a:avLst/>
+          </a:prstGeom>
+          <a:ln w="25400">
+            <a:tailEnd type="triangle"/>
+          </a:ln>
+        </p:spPr>
+        <p:style>
+          <a:lnRef idx="1">
+            <a:schemeClr val="dk1"/>
+          </a:lnRef>
+          <a:fillRef idx="0">
+            <a:schemeClr val="dk1"/>
+          </a:fillRef>
+          <a:effectRef idx="0">
+            <a:schemeClr val="dk1"/>
+          </a:effectRef>
+          <a:fontRef idx="minor">
+            <a:schemeClr val="tx1"/>
+          </a:fontRef>
+        </p:style>
+      </p:cxnSp>
+      <p:cxnSp>
+        <p:nvCxnSpPr>
+          <p:cNvPr id="113" name="Straight Arrow Connector 112">
+            <a:extLst>
+              <a:ext uri="{FF2B5EF4-FFF2-40B4-BE49-F238E27FC236}">
+                <a16:creationId xmlns:a16="http://schemas.microsoft.com/office/drawing/2014/main" id="{1040C1B3-7971-266C-3351-EBE2600B8499}"/>
+              </a:ext>
+            </a:extLst>
+          </p:cNvPr>
+          <p:cNvCxnSpPr>
+            <a:cxnSpLocks/>
+          </p:cNvCxnSpPr>
+          <p:nvPr/>
+        </p:nvCxnSpPr>
+        <p:spPr>
+          <a:xfrm flipV="1">
+            <a:off x="5055737" y="6484101"/>
+            <a:ext cx="1523167" cy="16023"/>
+          </a:xfrm>
+          <a:prstGeom prst="straightConnector1">
+            <a:avLst/>
+          </a:prstGeom>
+          <a:ln w="25400">
+            <a:tailEnd type="triangle"/>
+          </a:ln>
+        </p:spPr>
+        <p:style>
+          <a:lnRef idx="1">
+            <a:schemeClr val="dk1"/>
+          </a:lnRef>
+          <a:fillRef idx="0">
+            <a:schemeClr val="dk1"/>
+          </a:fillRef>
+          <a:effectRef idx="0">
+            <a:schemeClr val="dk1"/>
+          </a:effectRef>
+          <a:fontRef idx="minor">
+            <a:schemeClr val="tx1"/>
+          </a:fontRef>
+        </p:style>
+      </p:cxnSp>
+      <p:cxnSp>
+        <p:nvCxnSpPr>
+          <p:cNvPr id="115" name="Straight Arrow Connector 114">
+            <a:extLst>
+              <a:ext uri="{FF2B5EF4-FFF2-40B4-BE49-F238E27FC236}">
+                <a16:creationId xmlns:a16="http://schemas.microsoft.com/office/drawing/2014/main" id="{989CE6D4-7D45-E135-40EF-8474166E7999}"/>
+              </a:ext>
+            </a:extLst>
+          </p:cNvPr>
+          <p:cNvCxnSpPr>
+            <a:cxnSpLocks/>
+          </p:cNvCxnSpPr>
+          <p:nvPr/>
+        </p:nvCxnSpPr>
+        <p:spPr>
+          <a:xfrm flipV="1">
+            <a:off x="7992890" y="6476089"/>
+            <a:ext cx="1523167" cy="16023"/>
+          </a:xfrm>
+          <a:prstGeom prst="straightConnector1">
+            <a:avLst/>
+          </a:prstGeom>
+          <a:ln w="25400">
+            <a:tailEnd type="triangle"/>
+          </a:ln>
+        </p:spPr>
+        <p:style>
+          <a:lnRef idx="1">
+            <a:schemeClr val="dk1"/>
+          </a:lnRef>
+          <a:fillRef idx="0">
+            <a:schemeClr val="dk1"/>
+          </a:fillRef>
+          <a:effectRef idx="0">
+            <a:schemeClr val="dk1"/>
+          </a:effectRef>
+          <a:fontRef idx="minor">
+            <a:schemeClr val="tx1"/>
+          </a:fontRef>
+        </p:style>
+      </p:cxnSp>
     </p:spTree>
     <p:extLst>
       <p:ext uri="{BB962C8B-B14F-4D97-AF65-F5344CB8AC3E}">
